--- a/03-课件PPT/讲次版/第7章-3-讲次 7-3 · Agent 产品化与作品集表达.pptx
+++ b/03-课件PPT/讲次版/第7章-3-讲次 7-3 · Agent 产品化与作品集表达.pptx
@@ -10156,7 +10156,7 @@
       </p:sp>
       <p:pic>
         <p:nvPicPr>
-          <p:cNvPr id="5" name="Picture 4" descr="chart_400994.png"/>
+          <p:cNvPr id="5" name="Picture 4" descr="chart_883128.png"/>
           <p:cNvPicPr>
             <a:picLocks noChangeAspect="1"/>
           </p:cNvPicPr>
@@ -37967,8 +37967,8 @@
         </p:blipFill>
         <p:spPr>
           <a:xfrm>
-            <a:off x="1026566" y="762000"/>
-            <a:ext cx="10138867" cy="5760720"/>
+            <a:off x="869779" y="762000"/>
+            <a:ext cx="10452440" cy="5760720"/>
           </a:xfrm>
           <a:prstGeom prst="rect">
             <a:avLst/>
